--- a/title_filled.pptx
+++ b/title_filled.pptx
@@ -4641,7 +4641,7 @@
                       <a:srgbClr val="FFFFFF"/>
                     </a:solidFill>
                   </a:rPr>
-                  <a:t>[Course Code: to be filled]</a:t>
+                  <a:t>DA 378</a:t>
                 </a:r>
                 <a:endParaRPr lang="en-US" dirty="0"/>
               </a:p>
